--- a/app/FR_Monthly template.pptx
+++ b/app/FR_Monthly template.pptx
@@ -286,9 +286,145 @@
 <file path=ppt/revisionInfo.xml><?xml version="1.0" encoding="utf-8"?>
 <p1510:revInfo xmlns:a="http://schemas.openxmlformats.org/drawingml/2006/main" xmlns:r="http://schemas.openxmlformats.org/officeDocument/2006/relationships" xmlns:p1510="http://schemas.microsoft.com/office/powerpoint/2015/10/main">
   <p1510:revLst>
-    <p1510:client id="{396C2317-66BF-4179-81F9-71CFE1DD41C0}" v="10" dt="2026-02-20T08:13:52.700"/>
+    <p1510:client id="{740C1585-580A-499B-8AB1-98B53A28C4AA}" v="2" dt="2026-03-30T09:09:29.707"/>
   </p1510:revLst>
 </p1510:revInfo>
+</file>
+
+<file path=ppt/changesInfos/changesInfo1.xml><?xml version="1.0" encoding="utf-8"?>
+<pc:chgInfo xmlns:a="http://schemas.openxmlformats.org/drawingml/2006/main" xmlns:r="http://schemas.openxmlformats.org/officeDocument/2006/relationships" xmlns:ac="http://schemas.microsoft.com/office/drawing/2013/main/command" xmlns:pc="http://schemas.microsoft.com/office/powerpoint/2013/main/command">
+  <pc:docChgLst>
+    <pc:chgData name="Safiatou MORO" userId="ddb57cc4-b27a-4e20-a662-fed37f92d3d1" providerId="ADAL" clId="{05BD29F9-DCB6-4BEE-8DED-49FF75B6D9CA}"/>
+    <pc:docChg chg="undo custSel modSld">
+      <pc:chgData name="Safiatou MORO" userId="ddb57cc4-b27a-4e20-a662-fed37f92d3d1" providerId="ADAL" clId="{05BD29F9-DCB6-4BEE-8DED-49FF75B6D9CA}" dt="2026-03-30T09:10:23.108" v="37" actId="20577"/>
+      <pc:docMkLst>
+        <pc:docMk/>
+      </pc:docMkLst>
+      <pc:sldChg chg="addSp modSp">
+        <pc:chgData name="Safiatou MORO" userId="ddb57cc4-b27a-4e20-a662-fed37f92d3d1" providerId="ADAL" clId="{05BD29F9-DCB6-4BEE-8DED-49FF75B6D9CA}" dt="2026-03-30T09:09:28.216" v="36"/>
+        <pc:sldMkLst>
+          <pc:docMk/>
+          <pc:sldMk cId="4211008703" sldId="2147472936"/>
+        </pc:sldMkLst>
+        <pc:spChg chg="add mod">
+          <ac:chgData name="Safiatou MORO" userId="ddb57cc4-b27a-4e20-a662-fed37f92d3d1" providerId="ADAL" clId="{05BD29F9-DCB6-4BEE-8DED-49FF75B6D9CA}" dt="2026-03-30T09:09:28.216" v="36"/>
+          <ac:spMkLst>
+            <pc:docMk/>
+            <pc:sldMk cId="4211008703" sldId="2147472936"/>
+            <ac:spMk id="3" creationId="{4A5E3027-7409-B03B-3B2A-147B5476FD24}"/>
+          </ac:spMkLst>
+        </pc:spChg>
+      </pc:sldChg>
+      <pc:sldChg chg="modSp mod">
+        <pc:chgData name="Safiatou MORO" userId="ddb57cc4-b27a-4e20-a662-fed37f92d3d1" providerId="ADAL" clId="{05BD29F9-DCB6-4BEE-8DED-49FF75B6D9CA}" dt="2026-03-30T09:08:18.475" v="35" actId="1076"/>
+        <pc:sldMkLst>
+          <pc:docMk/>
+          <pc:sldMk cId="1126233307" sldId="2147472945"/>
+        </pc:sldMkLst>
+        <pc:spChg chg="mod">
+          <ac:chgData name="Safiatou MORO" userId="ddb57cc4-b27a-4e20-a662-fed37f92d3d1" providerId="ADAL" clId="{05BD29F9-DCB6-4BEE-8DED-49FF75B6D9CA}" dt="2026-03-30T09:08:18.475" v="35" actId="1076"/>
+          <ac:spMkLst>
+            <pc:docMk/>
+            <pc:sldMk cId="1126233307" sldId="2147472945"/>
+            <ac:spMk id="12" creationId="{48C072B9-B366-BDD8-D989-EC716F82F722}"/>
+          </ac:spMkLst>
+        </pc:spChg>
+      </pc:sldChg>
+      <pc:sldChg chg="delSp modSp mod">
+        <pc:chgData name="Safiatou MORO" userId="ddb57cc4-b27a-4e20-a662-fed37f92d3d1" providerId="ADAL" clId="{05BD29F9-DCB6-4BEE-8DED-49FF75B6D9CA}" dt="2026-03-30T09:10:23.108" v="37" actId="20577"/>
+        <pc:sldMkLst>
+          <pc:docMk/>
+          <pc:sldMk cId="1835699478" sldId="2147473050"/>
+        </pc:sldMkLst>
+        <pc:spChg chg="mod">
+          <ac:chgData name="Safiatou MORO" userId="ddb57cc4-b27a-4e20-a662-fed37f92d3d1" providerId="ADAL" clId="{05BD29F9-DCB6-4BEE-8DED-49FF75B6D9CA}" dt="2026-03-30T08:52:34.188" v="10" actId="1038"/>
+          <ac:spMkLst>
+            <pc:docMk/>
+            <pc:sldMk cId="1835699478" sldId="2147473050"/>
+            <ac:spMk id="3" creationId="{37127967-9ED5-8135-A7B0-8EC4009DB023}"/>
+          </ac:spMkLst>
+        </pc:spChg>
+        <pc:spChg chg="mod">
+          <ac:chgData name="Safiatou MORO" userId="ddb57cc4-b27a-4e20-a662-fed37f92d3d1" providerId="ADAL" clId="{05BD29F9-DCB6-4BEE-8DED-49FF75B6D9CA}" dt="2026-03-30T09:10:23.108" v="37" actId="20577"/>
+          <ac:spMkLst>
+            <pc:docMk/>
+            <pc:sldMk cId="1835699478" sldId="2147473050"/>
+            <ac:spMk id="33" creationId="{994C8677-7775-861F-7FFF-60D66919370B}"/>
+          </ac:spMkLst>
+        </pc:spChg>
+        <pc:spChg chg="del">
+          <ac:chgData name="Safiatou MORO" userId="ddb57cc4-b27a-4e20-a662-fed37f92d3d1" providerId="ADAL" clId="{05BD29F9-DCB6-4BEE-8DED-49FF75B6D9CA}" dt="2026-03-30T08:52:32.492" v="7" actId="478"/>
+          <ac:spMkLst>
+            <pc:docMk/>
+            <pc:sldMk cId="1835699478" sldId="2147473050"/>
+            <ac:spMk id="34" creationId="{5E964FE3-9C35-A3EA-7D73-4834964A7341}"/>
+          </ac:spMkLst>
+        </pc:spChg>
+      </pc:sldChg>
+      <pc:sldChg chg="delSp modSp mod">
+        <pc:chgData name="Safiatou MORO" userId="ddb57cc4-b27a-4e20-a662-fed37f92d3d1" providerId="ADAL" clId="{05BD29F9-DCB6-4BEE-8DED-49FF75B6D9CA}" dt="2026-03-30T08:54:41.881" v="32" actId="20577"/>
+        <pc:sldMkLst>
+          <pc:docMk/>
+          <pc:sldMk cId="2324992177" sldId="2147473059"/>
+        </pc:sldMkLst>
+        <pc:spChg chg="mod">
+          <ac:chgData name="Safiatou MORO" userId="ddb57cc4-b27a-4e20-a662-fed37f92d3d1" providerId="ADAL" clId="{05BD29F9-DCB6-4BEE-8DED-49FF75B6D9CA}" dt="2026-03-30T08:52:47.442" v="31" actId="1038"/>
+          <ac:spMkLst>
+            <pc:docMk/>
+            <pc:sldMk cId="2324992177" sldId="2147473059"/>
+            <ac:spMk id="3" creationId="{BC5115F0-2E01-D18C-A7AC-F24755E3DF0C}"/>
+          </ac:spMkLst>
+        </pc:spChg>
+        <pc:spChg chg="mod">
+          <ac:chgData name="Safiatou MORO" userId="ddb57cc4-b27a-4e20-a662-fed37f92d3d1" providerId="ADAL" clId="{05BD29F9-DCB6-4BEE-8DED-49FF75B6D9CA}" dt="2026-03-30T08:54:41.881" v="32" actId="20577"/>
+          <ac:spMkLst>
+            <pc:docMk/>
+            <pc:sldMk cId="2324992177" sldId="2147473059"/>
+            <ac:spMk id="50" creationId="{97F9B207-BA65-43BB-FBE7-EC5AAFC39C56}"/>
+          </ac:spMkLst>
+        </pc:spChg>
+        <pc:spChg chg="del">
+          <ac:chgData name="Safiatou MORO" userId="ddb57cc4-b27a-4e20-a662-fed37f92d3d1" providerId="ADAL" clId="{05BD29F9-DCB6-4BEE-8DED-49FF75B6D9CA}" dt="2026-03-30T08:52:40.129" v="21" actId="478"/>
+          <ac:spMkLst>
+            <pc:docMk/>
+            <pc:sldMk cId="2324992177" sldId="2147473059"/>
+            <ac:spMk id="51" creationId="{23AAFF3A-FC14-F5EE-6972-57F970413227}"/>
+          </ac:spMkLst>
+        </pc:spChg>
+      </pc:sldChg>
+      <pc:sldChg chg="modSp mod">
+        <pc:chgData name="Safiatou MORO" userId="ddb57cc4-b27a-4e20-a662-fed37f92d3d1" providerId="ADAL" clId="{05BD29F9-DCB6-4BEE-8DED-49FF75B6D9CA}" dt="2026-03-30T08:51:00.729" v="0" actId="20577"/>
+        <pc:sldMkLst>
+          <pc:docMk/>
+          <pc:sldMk cId="1991886015" sldId="2147473066"/>
+        </pc:sldMkLst>
+        <pc:spChg chg="mod">
+          <ac:chgData name="Safiatou MORO" userId="ddb57cc4-b27a-4e20-a662-fed37f92d3d1" providerId="ADAL" clId="{05BD29F9-DCB6-4BEE-8DED-49FF75B6D9CA}" dt="2026-03-30T08:51:00.729" v="0" actId="20577"/>
+          <ac:spMkLst>
+            <pc:docMk/>
+            <pc:sldMk cId="1991886015" sldId="2147473066"/>
+            <ac:spMk id="19" creationId="{7B69F535-5399-0C38-4400-98B1B1611C52}"/>
+          </ac:spMkLst>
+        </pc:spChg>
+      </pc:sldChg>
+      <pc:sldChg chg="modSp mod">
+        <pc:chgData name="Safiatou MORO" userId="ddb57cc4-b27a-4e20-a662-fed37f92d3d1" providerId="ADAL" clId="{05BD29F9-DCB6-4BEE-8DED-49FF75B6D9CA}" dt="2026-03-30T08:51:10.231" v="1" actId="20577"/>
+        <pc:sldMkLst>
+          <pc:docMk/>
+          <pc:sldMk cId="1153292060" sldId="2147473067"/>
+        </pc:sldMkLst>
+        <pc:spChg chg="mod">
+          <ac:chgData name="Safiatou MORO" userId="ddb57cc4-b27a-4e20-a662-fed37f92d3d1" providerId="ADAL" clId="{05BD29F9-DCB6-4BEE-8DED-49FF75B6D9CA}" dt="2026-03-30T08:51:10.231" v="1" actId="20577"/>
+          <ac:spMkLst>
+            <pc:docMk/>
+            <pc:sldMk cId="1153292060" sldId="2147473067"/>
+            <ac:spMk id="20" creationId="{FF9242BD-2326-E56C-52D2-99997BE41097}"/>
+          </ac:spMkLst>
+        </pc:spChg>
+      </pc:sldChg>
+    </pc:docChg>
+  </pc:docChgLst>
+</pc:chgInfo>
 </file>
 
 <file path=ppt/handoutMasters/handoutMaster1.xml><?xml version="1.0" encoding="utf-8"?>
@@ -385,7 +521,7 @@
           <a:p>
             <a:fld id="{8C878338-E163-4C54-9561-D6E9738BEB8B}" type="datetime1">
               <a:rPr lang="fr-FR" smtClean="0"/>
-              <a:t>26/03/2026</a:t>
+              <a:t>30/03/2026</a:t>
             </a:fld>
             <a:endParaRPr lang="fr-FR"/>
           </a:p>
@@ -563,7 +699,7 @@
           <a:p>
             <a:fld id="{A35F4535-3591-4AAD-9289-106FE70D9FD8}" type="datetime1">
               <a:rPr lang="fr-FR" smtClean="0"/>
-              <a:t>26/03/2026</a:t>
+              <a:t>30/03/2026</a:t>
             </a:fld>
             <a:endParaRPr lang="fr-FR"/>
           </a:p>
@@ -951,7 +1087,7 @@
           <a:p>
             <a:fld id="{4A36E841-AC53-4358-B08C-CEB57C3A490E}" type="datetime1">
               <a:rPr lang="fr-FR" smtClean="0"/>
-              <a:t>26/03/2026</a:t>
+              <a:t>30/03/2026</a:t>
             </a:fld>
             <a:endParaRPr lang="fr-FR"/>
           </a:p>
@@ -1249,7 +1385,7 @@
           <a:p>
             <a:fld id="{96644B93-F9AB-49B6-8AE8-03D43A9E344C}" type="datetime1">
               <a:rPr lang="fr-FR" smtClean="0"/>
-              <a:t>26/03/2026</a:t>
+              <a:t>30/03/2026</a:t>
             </a:fld>
             <a:endParaRPr lang="fr-FR"/>
           </a:p>
@@ -1617,7 +1753,7 @@
           <a:p>
             <a:fld id="{96644B93-F9AB-49B6-8AE8-03D43A9E344C}" type="datetime1">
               <a:rPr lang="fr-FR" smtClean="0"/>
-              <a:t>26/03/2026</a:t>
+              <a:t>30/03/2026</a:t>
             </a:fld>
             <a:endParaRPr lang="fr-FR"/>
           </a:p>
@@ -1779,7 +1915,7 @@
           <a:p>
             <a:fld id="{96644B93-F9AB-49B6-8AE8-03D43A9E344C}" type="datetime1">
               <a:rPr lang="fr-FR" smtClean="0"/>
-              <a:t>26/03/2026</a:t>
+              <a:t>30/03/2026</a:t>
             </a:fld>
             <a:endParaRPr lang="fr-FR"/>
           </a:p>
@@ -1941,7 +2077,7 @@
           <a:p>
             <a:fld id="{96644B93-F9AB-49B6-8AE8-03D43A9E344C}" type="datetime1">
               <a:rPr lang="fr-FR" smtClean="0"/>
-              <a:t>26/03/2026</a:t>
+              <a:t>30/03/2026</a:t>
             </a:fld>
             <a:endParaRPr lang="fr-FR"/>
           </a:p>
@@ -2049,7 +2185,7 @@
           <a:p>
             <a:fld id="{A35F4535-3591-4AAD-9289-106FE70D9FD8}" type="datetime1">
               <a:rPr lang="fr-FR" smtClean="0"/>
-              <a:t>26/03/2026</a:t>
+              <a:t>30/03/2026</a:t>
             </a:fld>
             <a:endParaRPr lang="fr-FR"/>
           </a:p>
@@ -2265,7 +2401,7 @@
           <a:p>
             <a:fld id="{96644B93-F9AB-49B6-8AE8-03D43A9E344C}" type="datetime1">
               <a:rPr lang="fr-FR" smtClean="0"/>
-              <a:t>26/03/2026</a:t>
+              <a:t>30/03/2026</a:t>
             </a:fld>
             <a:endParaRPr lang="fr-FR"/>
           </a:p>
@@ -2683,7 +2819,7 @@
           <a:p>
             <a:fld id="{96644B93-F9AB-49B6-8AE8-03D43A9E344C}" type="datetime1">
               <a:rPr lang="fr-FR" smtClean="0"/>
-              <a:t>26/03/2026</a:t>
+              <a:t>30/03/2026</a:t>
             </a:fld>
             <a:endParaRPr lang="fr-FR"/>
           </a:p>
@@ -2845,7 +2981,7 @@
           <a:p>
             <a:fld id="{96644B93-F9AB-49B6-8AE8-03D43A9E344C}" type="datetime1">
               <a:rPr lang="fr-FR" smtClean="0"/>
-              <a:t>26/03/2026</a:t>
+              <a:t>30/03/2026</a:t>
             </a:fld>
             <a:endParaRPr lang="fr-FR"/>
           </a:p>
@@ -10161,64 +10297,7 @@
               <a:buFont typeface="Arial" panose="020B0604020202020204" pitchFamily="34" charset="0"/>
               <a:buChar char="•"/>
             </a:pPr>
-            <a:r>
-              <a:rPr lang="en-US" sz="1200">
-                <a:solidFill>
-                  <a:srgbClr val="000000"/>
-                </a:solidFill>
-                <a:effectLst/>
-                <a:latin typeface="Calibri" panose="020F0502020204030204" pitchFamily="34" charset="0"/>
-              </a:rPr>
-              <a:t>On a month-over-month basis, sessions rose for all brands excep</a:t>
-            </a:r>
-            <a:r>
-              <a:rPr lang="en-US" sz="1200">
-                <a:solidFill>
-                  <a:srgbClr val="000000"/>
-                </a:solidFill>
-                <a:latin typeface="Calibri" panose="020F0502020204030204" pitchFamily="34" charset="0"/>
-              </a:rPr>
-              <a:t>t FT while leads increase for FT, JE and AB</a:t>
-            </a:r>
-            <a:r>
-              <a:rPr lang="en-US" sz="1200">
-                <a:solidFill>
-                  <a:srgbClr val="000000"/>
-                </a:solidFill>
-                <a:effectLst/>
-                <a:latin typeface="Calibri" panose="020F0502020204030204" pitchFamily="34" charset="0"/>
-              </a:rPr>
-              <a:t>.</a:t>
-            </a:r>
-          </a:p>
-          <a:p>
-            <a:pPr marL="173736" indent="-173736">
-              <a:spcAft>
-                <a:spcPts val="1200"/>
-              </a:spcAft>
-              <a:buFont typeface="Arial" panose="020B0604020202020204" pitchFamily="34" charset="0"/>
-              <a:buChar char="•"/>
-            </a:pPr>
-            <a:r>
-              <a:rPr lang="en-US" sz="1200">
-                <a:solidFill>
-                  <a:srgbClr val="000000"/>
-                </a:solidFill>
-                <a:effectLst/>
-                <a:latin typeface="Calibri" panose="020F0502020204030204" pitchFamily="34" charset="0"/>
-              </a:rPr>
-              <a:t>Year-over-year, </a:t>
-            </a:r>
-            <a:r>
-              <a:rPr lang="en-US" sz="1200">
-                <a:solidFill>
-                  <a:srgbClr val="000000"/>
-                </a:solidFill>
-                <a:latin typeface="Calibri" panose="020F0502020204030204" pitchFamily="34" charset="0"/>
-              </a:rPr>
-              <a:t>sessions and leads rose for all brands except FT</a:t>
-            </a:r>
-            <a:endParaRPr lang="en-US" sz="1200">
+            <a:endParaRPr lang="en-US" sz="1200" dirty="0">
               <a:solidFill>
                 <a:schemeClr val="tx1"/>
               </a:solidFill>
@@ -10999,56 +11078,11 @@
               <a:buFont typeface="Arial" panose="020B0604020202020204" pitchFamily="34" charset="0"/>
               <a:buChar char="•"/>
             </a:pPr>
-            <a:r>
-              <a:rPr lang="en-US" sz="1200">
-                <a:solidFill>
-                  <a:schemeClr val="tx1"/>
-                </a:solidFill>
-              </a:rPr>
-              <a:t>As of January 9th, the volume of leads for OPEL is projected to be 40% lower compared to the same period last year.</a:t>
-            </a:r>
-            <a:endParaRPr lang="en-US" sz="1200" noProof="0">
+            <a:endParaRPr lang="en-US" sz="1200" noProof="0" dirty="0">
               <a:solidFill>
                 <a:schemeClr val="tx1"/>
               </a:solidFill>
             </a:endParaRPr>
-          </a:p>
-        </p:txBody>
-      </p:sp>
-      <p:sp>
-        <p:nvSpPr>
-          <p:cNvPr id="34" name="ZoneTexte 33">
-            <a:extLst>
-              <a:ext uri="{FF2B5EF4-FFF2-40B4-BE49-F238E27FC236}">
-                <a16:creationId xmlns:a16="http://schemas.microsoft.com/office/drawing/2014/main" id="{5E964FE3-9C35-A3EA-7D73-4834964A7341}"/>
-              </a:ext>
-            </a:extLst>
-          </p:cNvPr>
-          <p:cNvSpPr txBox="1"/>
-          <p:nvPr/>
-        </p:nvSpPr>
-        <p:spPr>
-          <a:xfrm>
-            <a:off x="407942" y="2967076"/>
-            <a:ext cx="9383054" cy="369332"/>
-          </a:xfrm>
-          <a:prstGeom prst="rect">
-            <a:avLst/>
-          </a:prstGeom>
-          <a:noFill/>
-          <a:ln>
-            <a:solidFill>
-              <a:schemeClr val="accent1"/>
-            </a:solidFill>
-          </a:ln>
-        </p:spPr>
-        <p:txBody>
-          <a:bodyPr wrap="square" rtlCol="0">
-            <a:spAutoFit/>
-          </a:bodyPr>
-          <a:lstStyle/>
-          <a:p>
-            <a:endParaRPr lang="fr-FR"/>
           </a:p>
         </p:txBody>
       </p:sp>
@@ -11323,7 +11357,7 @@
         </p:nvSpPr>
         <p:spPr>
           <a:xfrm>
-            <a:off x="188913" y="1609539"/>
+            <a:off x="169249" y="1609539"/>
             <a:ext cx="9602083" cy="4534747"/>
           </a:xfrm>
           <a:prstGeom prst="rect">
@@ -11710,56 +11744,11 @@
               <a:buFont typeface="Arial" panose="020B0604020202020204" pitchFamily="34" charset="0"/>
               <a:buChar char="•"/>
             </a:pPr>
-            <a:r>
-              <a:rPr lang="en-US" sz="1200">
-                <a:solidFill>
-                  <a:schemeClr val="tx1"/>
-                </a:solidFill>
-              </a:rPr>
-              <a:t>As of January 9th, the volume of NC leads for OPEL is projected to be 18% higher compared to the same period last year.</a:t>
-            </a:r>
-            <a:endParaRPr lang="en-US" sz="1200" noProof="0">
+            <a:endParaRPr lang="en-US" sz="1200" noProof="0" dirty="0">
               <a:solidFill>
                 <a:schemeClr val="tx1"/>
               </a:solidFill>
             </a:endParaRPr>
-          </a:p>
-        </p:txBody>
-      </p:sp>
-      <p:sp>
-        <p:nvSpPr>
-          <p:cNvPr id="51" name="ZoneTexte 50">
-            <a:extLst>
-              <a:ext uri="{FF2B5EF4-FFF2-40B4-BE49-F238E27FC236}">
-                <a16:creationId xmlns:a16="http://schemas.microsoft.com/office/drawing/2014/main" id="{23AAFF3A-FC14-F5EE-6972-57F970413227}"/>
-              </a:ext>
-            </a:extLst>
-          </p:cNvPr>
-          <p:cNvSpPr txBox="1"/>
-          <p:nvPr/>
-        </p:nvSpPr>
-        <p:spPr>
-          <a:xfrm>
-            <a:off x="192658" y="3186742"/>
-            <a:ext cx="9583679" cy="369332"/>
-          </a:xfrm>
-          <a:prstGeom prst="rect">
-            <a:avLst/>
-          </a:prstGeom>
-          <a:noFill/>
-          <a:ln>
-            <a:solidFill>
-              <a:schemeClr val="accent1"/>
-            </a:solidFill>
-          </a:ln>
-        </p:spPr>
-        <p:txBody>
-          <a:bodyPr wrap="square" rtlCol="0">
-            <a:spAutoFit/>
-          </a:bodyPr>
-          <a:lstStyle/>
-          <a:p>
-            <a:endParaRPr lang="fr-FR"/>
           </a:p>
         </p:txBody>
       </p:sp>
@@ -44316,7 +44305,7 @@
         </p:nvSpPr>
         <p:spPr>
           <a:xfrm>
-            <a:off x="595226" y="1324931"/>
+            <a:off x="622658" y="1315787"/>
             <a:ext cx="10446399" cy="5057675"/>
           </a:xfrm>
           <a:prstGeom prst="rect">
@@ -52617,35 +52606,13 @@
               <a:buFont typeface="Arial" panose="020B0604020202020204" pitchFamily="34" charset="0"/>
               <a:buChar char="•"/>
             </a:pPr>
-            <a:r>
-              <a:rPr lang="en-US" sz="1200">
-                <a:solidFill>
-                  <a:srgbClr val="000000"/>
-                </a:solidFill>
-                <a:effectLst/>
-                <a:latin typeface="Calibri" panose="020F0502020204030204" pitchFamily="34" charset="0"/>
-              </a:rPr>
-              <a:t>Month-over-month, traffic for AP, DS, and OP rose, while leads increased exclusively for SP.</a:t>
-            </a:r>
-          </a:p>
-          <a:p>
-            <a:pPr marL="173736" indent="-173736" algn="l" rtl="0" eaLnBrk="1" latinLnBrk="0" hangingPunct="1">
-              <a:spcAft>
-                <a:spcPts val="1200"/>
-              </a:spcAft>
-              <a:buFont typeface="Arial" panose="020B0604020202020204" pitchFamily="34" charset="0"/>
-              <a:buChar char="•"/>
-            </a:pPr>
-            <a:r>
-              <a:rPr lang="en-US" sz="1200">
-                <a:solidFill>
-                  <a:srgbClr val="000000"/>
-                </a:solidFill>
-                <a:effectLst/>
-                <a:latin typeface="Calibri" panose="020F0502020204030204" pitchFamily="34" charset="0"/>
-              </a:rPr>
-              <a:t>Year-over-year, there was growth in traffic across all sessions except OP, with leads rising for all brands.</a:t>
-            </a:r>
+            <a:endParaRPr lang="en-US" sz="1200" dirty="0">
+              <a:solidFill>
+                <a:srgbClr val="000000"/>
+              </a:solidFill>
+              <a:effectLst/>
+              <a:latin typeface="Calibri" panose="020F0502020204030204" pitchFamily="34" charset="0"/>
+            </a:endParaRPr>
           </a:p>
         </p:txBody>
       </p:sp>
@@ -53811,6 +53778,14 @@
 </file>
 
 <file path=customXml/item1.xml><?xml version="1.0" encoding="utf-8"?>
+<p:properties xmlns:p="http://schemas.microsoft.com/office/2006/metadata/properties" xmlns:xsi="http://www.w3.org/2001/XMLSchema-instance" xmlns:pc="http://schemas.microsoft.com/office/infopath/2007/PartnerControls">
+  <documentManagement>
+    <_activity xmlns="bf8c8e12-e326-4a04-ac59-e9fa95848938" xsi:nil="true"/>
+  </documentManagement>
+</p:properties>
+</file>
+
+<file path=customXml/item2.xml><?xml version="1.0" encoding="utf-8"?>
 <?mso-contentType ?>
 <FormTemplates xmlns="http://schemas.microsoft.com/sharepoint/v3/contenttype/forms">
   <Display>DocumentLibraryForm</Display>
@@ -53819,7 +53794,7 @@
 </FormTemplates>
 </file>
 
-<file path=customXml/item2.xml><?xml version="1.0" encoding="utf-8"?>
+<file path=customXml/item3.xml><?xml version="1.0" encoding="utf-8"?>
 <ct:contentTypeSchema xmlns:ct="http://schemas.microsoft.com/office/2006/metadata/contentType" xmlns:ma="http://schemas.microsoft.com/office/2006/metadata/properties/metaAttributes" ct:_="" ma:_="" ma:contentTypeName="Document" ma:contentTypeID="0x010100384BE79F8F5EF24394EAC8C4081870EB" ma:contentTypeVersion="13" ma:contentTypeDescription="Crée un document." ma:contentTypeScope="" ma:versionID="4e4cb89b927625d909c4dcf25d140bf2">
   <xsd:schema xmlns:xsd="http://www.w3.org/2001/XMLSchema" xmlns:xs="http://www.w3.org/2001/XMLSchema" xmlns:p="http://schemas.microsoft.com/office/2006/metadata/properties" xmlns:ns3="bf8c8e12-e326-4a04-ac59-e9fa95848938" targetNamespace="http://schemas.microsoft.com/office/2006/metadata/properties" ma:root="true" ma:fieldsID="91272e5e268b40440f417e35427175cf" ns3:_="">
     <xsd:import namespace="bf8c8e12-e326-4a04-ac59-e9fa95848938"/>
@@ -54019,15 +53994,23 @@
 </ct:contentTypeSchema>
 </file>
 
-<file path=customXml/item3.xml><?xml version="1.0" encoding="utf-8"?>
-<p:properties xmlns:p="http://schemas.microsoft.com/office/2006/metadata/properties" xmlns:xsi="http://www.w3.org/2001/XMLSchema-instance" xmlns:pc="http://schemas.microsoft.com/office/infopath/2007/PartnerControls">
-  <documentManagement>
-    <_activity xmlns="bf8c8e12-e326-4a04-ac59-e9fa95848938" xsi:nil="true"/>
-  </documentManagement>
-</p:properties>
+<file path=customXml/itemProps1.xml><?xml version="1.0" encoding="utf-8"?>
+<ds:datastoreItem xmlns:ds="http://schemas.openxmlformats.org/officeDocument/2006/customXml" ds:itemID="{698594E9-77AB-4F35-99A2-A20A0BF9BB61}">
+  <ds:schemaRefs>
+    <ds:schemaRef ds:uri="bf8c8e12-e326-4a04-ac59-e9fa95848938"/>
+    <ds:schemaRef ds:uri="http://purl.org/dc/dcmitype/"/>
+    <ds:schemaRef ds:uri="http://purl.org/dc/elements/1.1/"/>
+    <ds:schemaRef ds:uri="http://purl.org/dc/terms/"/>
+    <ds:schemaRef ds:uri="http://schemas.microsoft.com/office/2006/documentManagement/types"/>
+    <ds:schemaRef ds:uri="http://schemas.microsoft.com/office/2006/metadata/properties"/>
+    <ds:schemaRef ds:uri="http://schemas.microsoft.com/office/infopath/2007/PartnerControls"/>
+    <ds:schemaRef ds:uri="http://schemas.openxmlformats.org/package/2006/metadata/core-properties"/>
+    <ds:schemaRef ds:uri="http://www.w3.org/XML/1998/namespace"/>
+  </ds:schemaRefs>
+</ds:datastoreItem>
 </file>
 
-<file path=customXml/itemProps1.xml><?xml version="1.0" encoding="utf-8"?>
+<file path=customXml/itemProps2.xml><?xml version="1.0" encoding="utf-8"?>
 <ds:datastoreItem xmlns:ds="http://schemas.openxmlformats.org/officeDocument/2006/customXml" ds:itemID="{E595EAEC-7F91-419F-ABD9-843E8114352D}">
   <ds:schemaRefs>
     <ds:schemaRef ds:uri="http://schemas.microsoft.com/sharepoint/v3/contenttype/forms"/>
@@ -54035,7 +54018,7 @@
 </ds:datastoreItem>
 </file>
 
-<file path=customXml/itemProps2.xml><?xml version="1.0" encoding="utf-8"?>
+<file path=customXml/itemProps3.xml><?xml version="1.0" encoding="utf-8"?>
 <ds:datastoreItem xmlns:ds="http://schemas.openxmlformats.org/officeDocument/2006/customXml" ds:itemID="{1F2F097F-0E14-4F9E-A665-A82F0C8C9613}">
   <ds:schemaRefs>
     <ds:schemaRef ds:uri="bf8c8e12-e326-4a04-ac59-e9fa95848938"/>
@@ -54051,20 +54034,4 @@
     <ds:schemaRef ds:uri="http://www.w3.org/2001/XMLSchema"/>
   </ds:schemaRefs>
 </ds:datastoreItem>
-</file>
-
-<file path=customXml/itemProps3.xml><?xml version="1.0" encoding="utf-8"?>
-<ds:datastoreItem xmlns:ds="http://schemas.openxmlformats.org/officeDocument/2006/customXml" ds:itemID="{698594E9-77AB-4F35-99A2-A20A0BF9BB61}">
-  <ds:schemaRefs>
-    <ds:schemaRef ds:uri="bf8c8e12-e326-4a04-ac59-e9fa95848938"/>
-    <ds:schemaRef ds:uri="http://purl.org/dc/dcmitype/"/>
-    <ds:schemaRef ds:uri="http://purl.org/dc/elements/1.1/"/>
-    <ds:schemaRef ds:uri="http://purl.org/dc/terms/"/>
-    <ds:schemaRef ds:uri="http://schemas.microsoft.com/office/2006/documentManagement/types"/>
-    <ds:schemaRef ds:uri="http://schemas.microsoft.com/office/2006/metadata/properties"/>
-    <ds:schemaRef ds:uri="http://schemas.microsoft.com/office/infopath/2007/PartnerControls"/>
-    <ds:schemaRef ds:uri="http://schemas.openxmlformats.org/package/2006/metadata/core-properties"/>
-    <ds:schemaRef ds:uri="http://www.w3.org/XML/1998/namespace"/>
-  </ds:schemaRefs>
-</ds:datastoreItem>
 </file>
--- a/app/FR_Monthly template.pptx
+++ b/app/FR_Monthly template.pptx
@@ -283,20 +283,12 @@
 </p:cmAuthorLst>
 </file>
 
-<file path=ppt/revisionInfo.xml><?xml version="1.0" encoding="utf-8"?>
-<p1510:revInfo xmlns:a="http://schemas.openxmlformats.org/drawingml/2006/main" xmlns:r="http://schemas.openxmlformats.org/officeDocument/2006/relationships" xmlns:p1510="http://schemas.microsoft.com/office/powerpoint/2015/10/main">
-  <p1510:revLst>
-    <p1510:client id="{740C1585-580A-499B-8AB1-98B53A28C4AA}" v="2" dt="2026-03-30T09:09:29.707"/>
-  </p1510:revLst>
-</p1510:revInfo>
-</file>
-
 <file path=ppt/changesInfos/changesInfo1.xml><?xml version="1.0" encoding="utf-8"?>
 <pc:chgInfo xmlns:a="http://schemas.openxmlformats.org/drawingml/2006/main" xmlns:r="http://schemas.openxmlformats.org/officeDocument/2006/relationships" xmlns:ac="http://schemas.microsoft.com/office/drawing/2013/main/command" xmlns:pc="http://schemas.microsoft.com/office/powerpoint/2013/main/command">
   <pc:docChgLst>
     <pc:chgData name="Safiatou MORO" userId="ddb57cc4-b27a-4e20-a662-fed37f92d3d1" providerId="ADAL" clId="{05BD29F9-DCB6-4BEE-8DED-49FF75B6D9CA}"/>
     <pc:docChg chg="undo custSel modSld">
-      <pc:chgData name="Safiatou MORO" userId="ddb57cc4-b27a-4e20-a662-fed37f92d3d1" providerId="ADAL" clId="{05BD29F9-DCB6-4BEE-8DED-49FF75B6D9CA}" dt="2026-03-30T09:10:23.108" v="37" actId="20577"/>
+      <pc:chgData name="Safiatou MORO" userId="ddb57cc4-b27a-4e20-a662-fed37f92d3d1" providerId="ADAL" clId="{05BD29F9-DCB6-4BEE-8DED-49FF75B6D9CA}" dt="2026-04-21T12:44:40.257" v="47" actId="20577"/>
       <pc:docMkLst>
         <pc:docMk/>
       </pc:docMkLst>
@@ -306,14 +298,6 @@
           <pc:docMk/>
           <pc:sldMk cId="4211008703" sldId="2147472936"/>
         </pc:sldMkLst>
-        <pc:spChg chg="add mod">
-          <ac:chgData name="Safiatou MORO" userId="ddb57cc4-b27a-4e20-a662-fed37f92d3d1" providerId="ADAL" clId="{05BD29F9-DCB6-4BEE-8DED-49FF75B6D9CA}" dt="2026-03-30T09:09:28.216" v="36"/>
-          <ac:spMkLst>
-            <pc:docMk/>
-            <pc:sldMk cId="4211008703" sldId="2147472936"/>
-            <ac:spMk id="3" creationId="{4A5E3027-7409-B03B-3B2A-147B5476FD24}"/>
-          </ac:spMkLst>
-        </pc:spChg>
       </pc:sldChg>
       <pc:sldChg chg="modSp mod">
         <pc:chgData name="Safiatou MORO" userId="ddb57cc4-b27a-4e20-a662-fed37f92d3d1" providerId="ADAL" clId="{05BD29F9-DCB6-4BEE-8DED-49FF75B6D9CA}" dt="2026-03-30T09:08:18.475" v="35" actId="1076"/>
@@ -352,14 +336,6 @@
             <ac:spMk id="33" creationId="{994C8677-7775-861F-7FFF-60D66919370B}"/>
           </ac:spMkLst>
         </pc:spChg>
-        <pc:spChg chg="del">
-          <ac:chgData name="Safiatou MORO" userId="ddb57cc4-b27a-4e20-a662-fed37f92d3d1" providerId="ADAL" clId="{05BD29F9-DCB6-4BEE-8DED-49FF75B6D9CA}" dt="2026-03-30T08:52:32.492" v="7" actId="478"/>
-          <ac:spMkLst>
-            <pc:docMk/>
-            <pc:sldMk cId="1835699478" sldId="2147473050"/>
-            <ac:spMk id="34" creationId="{5E964FE3-9C35-A3EA-7D73-4834964A7341}"/>
-          </ac:spMkLst>
-        </pc:spChg>
       </pc:sldChg>
       <pc:sldChg chg="delSp modSp mod">
         <pc:chgData name="Safiatou MORO" userId="ddb57cc4-b27a-4e20-a662-fed37f92d3d1" providerId="ADAL" clId="{05BD29F9-DCB6-4BEE-8DED-49FF75B6D9CA}" dt="2026-03-30T08:54:41.881" v="32" actId="20577"/>
@@ -381,14 +357,6 @@
             <pc:docMk/>
             <pc:sldMk cId="2324992177" sldId="2147473059"/>
             <ac:spMk id="50" creationId="{97F9B207-BA65-43BB-FBE7-EC5AAFC39C56}"/>
-          </ac:spMkLst>
-        </pc:spChg>
-        <pc:spChg chg="del">
-          <ac:chgData name="Safiatou MORO" userId="ddb57cc4-b27a-4e20-a662-fed37f92d3d1" providerId="ADAL" clId="{05BD29F9-DCB6-4BEE-8DED-49FF75B6D9CA}" dt="2026-03-30T08:52:40.129" v="21" actId="478"/>
-          <ac:spMkLst>
-            <pc:docMk/>
-            <pc:sldMk cId="2324992177" sldId="2147473059"/>
-            <ac:spMk id="51" creationId="{23AAFF3A-FC14-F5EE-6972-57F970413227}"/>
           </ac:spMkLst>
         </pc:spChg>
       </pc:sldChg>
@@ -422,6 +390,81 @@
           </ac:spMkLst>
         </pc:spChg>
       </pc:sldChg>
+      <pc:sldChg chg="modSp mod">
+        <pc:chgData name="Safiatou MORO" userId="ddb57cc4-b27a-4e20-a662-fed37f92d3d1" providerId="ADAL" clId="{05BD29F9-DCB6-4BEE-8DED-49FF75B6D9CA}" dt="2026-04-21T12:44:09.734" v="39" actId="20577"/>
+        <pc:sldMkLst>
+          <pc:docMk/>
+          <pc:sldMk cId="1230632136" sldId="2147473096"/>
+        </pc:sldMkLst>
+        <pc:spChg chg="mod">
+          <ac:chgData name="Safiatou MORO" userId="ddb57cc4-b27a-4e20-a662-fed37f92d3d1" providerId="ADAL" clId="{05BD29F9-DCB6-4BEE-8DED-49FF75B6D9CA}" dt="2026-04-21T12:44:09.734" v="39" actId="20577"/>
+          <ac:spMkLst>
+            <pc:docMk/>
+            <pc:sldMk cId="1230632136" sldId="2147473096"/>
+            <ac:spMk id="11" creationId="{28FCEE22-E5D5-A612-5D2C-B208A9821CEA}"/>
+          </ac:spMkLst>
+        </pc:spChg>
+      </pc:sldChg>
+      <pc:sldChg chg="modSp mod">
+        <pc:chgData name="Safiatou MORO" userId="ddb57cc4-b27a-4e20-a662-fed37f92d3d1" providerId="ADAL" clId="{05BD29F9-DCB6-4BEE-8DED-49FF75B6D9CA}" dt="2026-04-21T12:44:27.342" v="43" actId="20577"/>
+        <pc:sldMkLst>
+          <pc:docMk/>
+          <pc:sldMk cId="3017814414" sldId="2147473100"/>
+        </pc:sldMkLst>
+        <pc:spChg chg="mod">
+          <ac:chgData name="Safiatou MORO" userId="ddb57cc4-b27a-4e20-a662-fed37f92d3d1" providerId="ADAL" clId="{05BD29F9-DCB6-4BEE-8DED-49FF75B6D9CA}" dt="2026-04-21T12:44:27.342" v="43" actId="20577"/>
+          <ac:spMkLst>
+            <pc:docMk/>
+            <pc:sldMk cId="3017814414" sldId="2147473100"/>
+            <ac:spMk id="11" creationId="{7A3DCF41-4F5F-C99A-8435-C7931873EB1F}"/>
+          </ac:spMkLst>
+        </pc:spChg>
+      </pc:sldChg>
+      <pc:sldChg chg="modSp mod">
+        <pc:chgData name="Safiatou MORO" userId="ddb57cc4-b27a-4e20-a662-fed37f92d3d1" providerId="ADAL" clId="{05BD29F9-DCB6-4BEE-8DED-49FF75B6D9CA}" dt="2026-04-21T12:44:33.890" v="45" actId="20577"/>
+        <pc:sldMkLst>
+          <pc:docMk/>
+          <pc:sldMk cId="1371344053" sldId="2147473104"/>
+        </pc:sldMkLst>
+        <pc:spChg chg="mod">
+          <ac:chgData name="Safiatou MORO" userId="ddb57cc4-b27a-4e20-a662-fed37f92d3d1" providerId="ADAL" clId="{05BD29F9-DCB6-4BEE-8DED-49FF75B6D9CA}" dt="2026-04-21T12:44:33.890" v="45" actId="20577"/>
+          <ac:spMkLst>
+            <pc:docMk/>
+            <pc:sldMk cId="1371344053" sldId="2147473104"/>
+            <ac:spMk id="11" creationId="{DC38E9FA-254F-C2D8-2E55-BD4451965E18}"/>
+          </ac:spMkLst>
+        </pc:spChg>
+      </pc:sldChg>
+      <pc:sldChg chg="modSp mod">
+        <pc:chgData name="Safiatou MORO" userId="ddb57cc4-b27a-4e20-a662-fed37f92d3d1" providerId="ADAL" clId="{05BD29F9-DCB6-4BEE-8DED-49FF75B6D9CA}" dt="2026-04-21T12:44:20.808" v="41" actId="20577"/>
+        <pc:sldMkLst>
+          <pc:docMk/>
+          <pc:sldMk cId="1019483770" sldId="2147473108"/>
+        </pc:sldMkLst>
+        <pc:spChg chg="mod">
+          <ac:chgData name="Safiatou MORO" userId="ddb57cc4-b27a-4e20-a662-fed37f92d3d1" providerId="ADAL" clId="{05BD29F9-DCB6-4BEE-8DED-49FF75B6D9CA}" dt="2026-04-21T12:44:20.808" v="41" actId="20577"/>
+          <ac:spMkLst>
+            <pc:docMk/>
+            <pc:sldMk cId="1019483770" sldId="2147473108"/>
+            <ac:spMk id="11" creationId="{4EC18AAF-20E2-0057-60BA-A465B416524E}"/>
+          </ac:spMkLst>
+        </pc:spChg>
+      </pc:sldChg>
+      <pc:sldChg chg="modSp mod">
+        <pc:chgData name="Safiatou MORO" userId="ddb57cc4-b27a-4e20-a662-fed37f92d3d1" providerId="ADAL" clId="{05BD29F9-DCB6-4BEE-8DED-49FF75B6D9CA}" dt="2026-04-21T12:44:40.257" v="47" actId="20577"/>
+        <pc:sldMkLst>
+          <pc:docMk/>
+          <pc:sldMk cId="4184883490" sldId="2147473112"/>
+        </pc:sldMkLst>
+        <pc:spChg chg="mod">
+          <ac:chgData name="Safiatou MORO" userId="ddb57cc4-b27a-4e20-a662-fed37f92d3d1" providerId="ADAL" clId="{05BD29F9-DCB6-4BEE-8DED-49FF75B6D9CA}" dt="2026-04-21T12:44:40.257" v="47" actId="20577"/>
+          <ac:spMkLst>
+            <pc:docMk/>
+            <pc:sldMk cId="4184883490" sldId="2147473112"/>
+            <ac:spMk id="11" creationId="{BD21F6C1-42B9-5FB1-19E6-5C7D919C150F}"/>
+          </ac:spMkLst>
+        </pc:spChg>
+      </pc:sldChg>
     </pc:docChg>
   </pc:docChgLst>
 </pc:chgInfo>
@@ -521,7 +564,7 @@
           <a:p>
             <a:fld id="{8C878338-E163-4C54-9561-D6E9738BEB8B}" type="datetime1">
               <a:rPr lang="fr-FR" smtClean="0"/>
-              <a:t>30/03/2026</a:t>
+              <a:t>21/04/2026</a:t>
             </a:fld>
             <a:endParaRPr lang="fr-FR"/>
           </a:p>
@@ -699,7 +742,7 @@
           <a:p>
             <a:fld id="{A35F4535-3591-4AAD-9289-106FE70D9FD8}" type="datetime1">
               <a:rPr lang="fr-FR" smtClean="0"/>
-              <a:t>30/03/2026</a:t>
+              <a:t>21/04/2026</a:t>
             </a:fld>
             <a:endParaRPr lang="fr-FR"/>
           </a:p>
@@ -1087,7 +1130,7 @@
           <a:p>
             <a:fld id="{4A36E841-AC53-4358-B08C-CEB57C3A490E}" type="datetime1">
               <a:rPr lang="fr-FR" smtClean="0"/>
-              <a:t>30/03/2026</a:t>
+              <a:t>21/04/2026</a:t>
             </a:fld>
             <a:endParaRPr lang="fr-FR"/>
           </a:p>
@@ -1385,7 +1428,7 @@
           <a:p>
             <a:fld id="{96644B93-F9AB-49B6-8AE8-03D43A9E344C}" type="datetime1">
               <a:rPr lang="fr-FR" smtClean="0"/>
-              <a:t>30/03/2026</a:t>
+              <a:t>21/04/2026</a:t>
             </a:fld>
             <a:endParaRPr lang="fr-FR"/>
           </a:p>
@@ -1753,7 +1796,7 @@
           <a:p>
             <a:fld id="{96644B93-F9AB-49B6-8AE8-03D43A9E344C}" type="datetime1">
               <a:rPr lang="fr-FR" smtClean="0"/>
-              <a:t>30/03/2026</a:t>
+              <a:t>21/04/2026</a:t>
             </a:fld>
             <a:endParaRPr lang="fr-FR"/>
           </a:p>
@@ -1915,7 +1958,7 @@
           <a:p>
             <a:fld id="{96644B93-F9AB-49B6-8AE8-03D43A9E344C}" type="datetime1">
               <a:rPr lang="fr-FR" smtClean="0"/>
-              <a:t>30/03/2026</a:t>
+              <a:t>21/04/2026</a:t>
             </a:fld>
             <a:endParaRPr lang="fr-FR"/>
           </a:p>
@@ -2077,7 +2120,7 @@
           <a:p>
             <a:fld id="{96644B93-F9AB-49B6-8AE8-03D43A9E344C}" type="datetime1">
               <a:rPr lang="fr-FR" smtClean="0"/>
-              <a:t>30/03/2026</a:t>
+              <a:t>21/04/2026</a:t>
             </a:fld>
             <a:endParaRPr lang="fr-FR"/>
           </a:p>
@@ -2185,7 +2228,7 @@
           <a:p>
             <a:fld id="{A35F4535-3591-4AAD-9289-106FE70D9FD8}" type="datetime1">
               <a:rPr lang="fr-FR" smtClean="0"/>
-              <a:t>30/03/2026</a:t>
+              <a:t>21/04/2026</a:t>
             </a:fld>
             <a:endParaRPr lang="fr-FR"/>
           </a:p>
@@ -2401,7 +2444,7 @@
           <a:p>
             <a:fld id="{96644B93-F9AB-49B6-8AE8-03D43A9E344C}" type="datetime1">
               <a:rPr lang="fr-FR" smtClean="0"/>
-              <a:t>30/03/2026</a:t>
+              <a:t>21/04/2026</a:t>
             </a:fld>
             <a:endParaRPr lang="fr-FR"/>
           </a:p>
@@ -2819,7 +2862,7 @@
           <a:p>
             <a:fld id="{96644B93-F9AB-49B6-8AE8-03D43A9E344C}" type="datetime1">
               <a:rPr lang="fr-FR" smtClean="0"/>
-              <a:t>30/03/2026</a:t>
+              <a:t>21/04/2026</a:t>
             </a:fld>
             <a:endParaRPr lang="fr-FR"/>
           </a:p>
@@ -2981,7 +3024,7 @@
           <a:p>
             <a:fld id="{96644B93-F9AB-49B6-8AE8-03D43A9E344C}" type="datetime1">
               <a:rPr lang="fr-FR" smtClean="0"/>
-              <a:t>30/03/2026</a:t>
+              <a:t>21/04/2026</a:t>
             </a:fld>
             <a:endParaRPr lang="fr-FR"/>
           </a:p>
@@ -28207,7 +28250,7 @@
             <a:pPr algn="ctr"/>
             <a:r>
               <a:rPr lang="fr-FR" dirty="0"/>
-              <a:t>PH_LKR_1</a:t>
+              <a:t>PH_LKR_3</a:t>
             </a:r>
           </a:p>
         </p:txBody>
@@ -30913,7 +30956,7 @@
             <a:pPr algn="ctr"/>
             <a:r>
               <a:rPr lang="fr-FR" dirty="0"/>
-              <a:t>PH_LKR_1</a:t>
+              <a:t>PH_LKR_3</a:t>
             </a:r>
           </a:p>
         </p:txBody>
@@ -34264,7 +34307,7 @@
             <a:pPr algn="ctr"/>
             <a:r>
               <a:rPr lang="fr-FR" dirty="0"/>
-              <a:t>PH_LKR_1</a:t>
+              <a:t>PH_LKR_3</a:t>
             </a:r>
           </a:p>
         </p:txBody>
@@ -36970,7 +37013,7 @@
             <a:pPr algn="ctr"/>
             <a:r>
               <a:rPr lang="fr-FR" dirty="0"/>
-              <a:t>PH_LKR_1</a:t>
+              <a:t>PH_LKR_3</a:t>
             </a:r>
           </a:p>
         </p:txBody>
@@ -40308,7 +40351,7 @@
             <a:pPr algn="ctr"/>
             <a:r>
               <a:rPr lang="fr-FR" dirty="0"/>
-              <a:t>PH_LKR_1</a:t>
+              <a:t>PH_LKR_3</a:t>
             </a:r>
           </a:p>
         </p:txBody>
@@ -53778,23 +53821,6 @@
 </file>
 
 <file path=customXml/item1.xml><?xml version="1.0" encoding="utf-8"?>
-<p:properties xmlns:p="http://schemas.microsoft.com/office/2006/metadata/properties" xmlns:xsi="http://www.w3.org/2001/XMLSchema-instance" xmlns:pc="http://schemas.microsoft.com/office/infopath/2007/PartnerControls">
-  <documentManagement>
-    <_activity xmlns="bf8c8e12-e326-4a04-ac59-e9fa95848938" xsi:nil="true"/>
-  </documentManagement>
-</p:properties>
-</file>
-
-<file path=customXml/item2.xml><?xml version="1.0" encoding="utf-8"?>
-<?mso-contentType ?>
-<FormTemplates xmlns="http://schemas.microsoft.com/sharepoint/v3/contenttype/forms">
-  <Display>DocumentLibraryForm</Display>
-  <Edit>DocumentLibraryForm</Edit>
-  <New>DocumentLibraryForm</New>
-</FormTemplates>
-</file>
-
-<file path=customXml/item3.xml><?xml version="1.0" encoding="utf-8"?>
 <ct:contentTypeSchema xmlns:ct="http://schemas.microsoft.com/office/2006/metadata/contentType" xmlns:ma="http://schemas.microsoft.com/office/2006/metadata/properties/metaAttributes" ct:_="" ma:_="" ma:contentTypeName="Document" ma:contentTypeID="0x010100384BE79F8F5EF24394EAC8C4081870EB" ma:contentTypeVersion="13" ma:contentTypeDescription="Crée un document." ma:contentTypeScope="" ma:versionID="4e4cb89b927625d909c4dcf25d140bf2">
   <xsd:schema xmlns:xsd="http://www.w3.org/2001/XMLSchema" xmlns:xs="http://www.w3.org/2001/XMLSchema" xmlns:p="http://schemas.microsoft.com/office/2006/metadata/properties" xmlns:ns3="bf8c8e12-e326-4a04-ac59-e9fa95848938" targetNamespace="http://schemas.microsoft.com/office/2006/metadata/properties" ma:root="true" ma:fieldsID="91272e5e268b40440f417e35427175cf" ns3:_="">
     <xsd:import namespace="bf8c8e12-e326-4a04-ac59-e9fa95848938"/>
@@ -53994,7 +54020,42 @@
 </ct:contentTypeSchema>
 </file>
 
+<file path=customXml/item2.xml><?xml version="1.0" encoding="utf-8"?>
+<p:properties xmlns:p="http://schemas.microsoft.com/office/2006/metadata/properties" xmlns:xsi="http://www.w3.org/2001/XMLSchema-instance" xmlns:pc="http://schemas.microsoft.com/office/infopath/2007/PartnerControls">
+  <documentManagement>
+    <_activity xmlns="bf8c8e12-e326-4a04-ac59-e9fa95848938" xsi:nil="true"/>
+  </documentManagement>
+</p:properties>
+</file>
+
+<file path=customXml/item3.xml><?xml version="1.0" encoding="utf-8"?>
+<?mso-contentType ?>
+<FormTemplates xmlns="http://schemas.microsoft.com/sharepoint/v3/contenttype/forms">
+  <Display>DocumentLibraryForm</Display>
+  <Edit>DocumentLibraryForm</Edit>
+  <New>DocumentLibraryForm</New>
+</FormTemplates>
+</file>
+
 <file path=customXml/itemProps1.xml><?xml version="1.0" encoding="utf-8"?>
+<ds:datastoreItem xmlns:ds="http://schemas.openxmlformats.org/officeDocument/2006/customXml" ds:itemID="{1F2F097F-0E14-4F9E-A665-A82F0C8C9613}">
+  <ds:schemaRefs>
+    <ds:schemaRef ds:uri="bf8c8e12-e326-4a04-ac59-e9fa95848938"/>
+    <ds:schemaRef ds:uri="http://purl.org/dc/elements/1.1/"/>
+    <ds:schemaRef ds:uri="http://purl.org/dc/terms/"/>
+    <ds:schemaRef ds:uri="http://schemas.microsoft.com/internal/obd"/>
+    <ds:schemaRef ds:uri="http://schemas.microsoft.com/office/2006/documentManagement/types"/>
+    <ds:schemaRef ds:uri="http://schemas.microsoft.com/office/2006/metadata/contentType"/>
+    <ds:schemaRef ds:uri="http://schemas.microsoft.com/office/2006/metadata/properties"/>
+    <ds:schemaRef ds:uri="http://schemas.microsoft.com/office/2006/metadata/properties/metaAttributes"/>
+    <ds:schemaRef ds:uri="http://schemas.microsoft.com/office/infopath/2007/PartnerControls"/>
+    <ds:schemaRef ds:uri="http://schemas.openxmlformats.org/package/2006/metadata/core-properties"/>
+    <ds:schemaRef ds:uri="http://www.w3.org/2001/XMLSchema"/>
+  </ds:schemaRefs>
+</ds:datastoreItem>
+</file>
+
+<file path=customXml/itemProps2.xml><?xml version="1.0" encoding="utf-8"?>
 <ds:datastoreItem xmlns:ds="http://schemas.openxmlformats.org/officeDocument/2006/customXml" ds:itemID="{698594E9-77AB-4F35-99A2-A20A0BF9BB61}">
   <ds:schemaRefs>
     <ds:schemaRef ds:uri="bf8c8e12-e326-4a04-ac59-e9fa95848938"/>
@@ -54010,28 +54071,10 @@
 </ds:datastoreItem>
 </file>
 
-<file path=customXml/itemProps2.xml><?xml version="1.0" encoding="utf-8"?>
+<file path=customXml/itemProps3.xml><?xml version="1.0" encoding="utf-8"?>
 <ds:datastoreItem xmlns:ds="http://schemas.openxmlformats.org/officeDocument/2006/customXml" ds:itemID="{E595EAEC-7F91-419F-ABD9-843E8114352D}">
   <ds:schemaRefs>
     <ds:schemaRef ds:uri="http://schemas.microsoft.com/sharepoint/v3/contenttype/forms"/>
   </ds:schemaRefs>
 </ds:datastoreItem>
-</file>
-
-<file path=customXml/itemProps3.xml><?xml version="1.0" encoding="utf-8"?>
-<ds:datastoreItem xmlns:ds="http://schemas.openxmlformats.org/officeDocument/2006/customXml" ds:itemID="{1F2F097F-0E14-4F9E-A665-A82F0C8C9613}">
-  <ds:schemaRefs>
-    <ds:schemaRef ds:uri="bf8c8e12-e326-4a04-ac59-e9fa95848938"/>
-    <ds:schemaRef ds:uri="http://purl.org/dc/elements/1.1/"/>
-    <ds:schemaRef ds:uri="http://purl.org/dc/terms/"/>
-    <ds:schemaRef ds:uri="http://schemas.microsoft.com/internal/obd"/>
-    <ds:schemaRef ds:uri="http://schemas.microsoft.com/office/2006/documentManagement/types"/>
-    <ds:schemaRef ds:uri="http://schemas.microsoft.com/office/2006/metadata/contentType"/>
-    <ds:schemaRef ds:uri="http://schemas.microsoft.com/office/2006/metadata/properties"/>
-    <ds:schemaRef ds:uri="http://schemas.microsoft.com/office/2006/metadata/properties/metaAttributes"/>
-    <ds:schemaRef ds:uri="http://schemas.microsoft.com/office/infopath/2007/PartnerControls"/>
-    <ds:schemaRef ds:uri="http://schemas.openxmlformats.org/package/2006/metadata/core-properties"/>
-    <ds:schemaRef ds:uri="http://www.w3.org/2001/XMLSchema"/>
-  </ds:schemaRefs>
-</ds:datastoreItem>
 </file>